--- a/8 instalacao de woocomerce.pptx
+++ b/8 instalacao de woocomerce.pptx
@@ -5,7 +5,7 @@
     <p:sldMasterId id="2147483718" r:id="rId1"/>
   </p:sldMasterIdLst>
   <p:notesMasterIdLst>
-    <p:notesMasterId r:id="rId29"/>
+    <p:notesMasterId r:id="rId27"/>
   </p:notesMasterIdLst>
   <p:sldIdLst>
     <p:sldId id="256" r:id="rId2"/>
@@ -24,17 +24,15 @@
     <p:sldId id="281" r:id="rId15"/>
     <p:sldId id="280" r:id="rId16"/>
     <p:sldId id="282" r:id="rId17"/>
-    <p:sldId id="260" r:id="rId18"/>
-    <p:sldId id="261" r:id="rId19"/>
-    <p:sldId id="262" r:id="rId20"/>
-    <p:sldId id="263" r:id="rId21"/>
-    <p:sldId id="264" r:id="rId22"/>
-    <p:sldId id="265" r:id="rId23"/>
-    <p:sldId id="266" r:id="rId24"/>
-    <p:sldId id="267" r:id="rId25"/>
-    <p:sldId id="268" r:id="rId26"/>
-    <p:sldId id="269" r:id="rId27"/>
-    <p:sldId id="270" r:id="rId28"/>
+    <p:sldId id="283" r:id="rId18"/>
+    <p:sldId id="263" r:id="rId19"/>
+    <p:sldId id="264" r:id="rId20"/>
+    <p:sldId id="265" r:id="rId21"/>
+    <p:sldId id="266" r:id="rId22"/>
+    <p:sldId id="267" r:id="rId23"/>
+    <p:sldId id="268" r:id="rId24"/>
+    <p:sldId id="269" r:id="rId25"/>
+    <p:sldId id="270" r:id="rId26"/>
   </p:sldIdLst>
   <p:sldSz cx="12192000" cy="6858000"/>
   <p:notesSz cx="6858000" cy="9144000"/>
@@ -1131,7 +1129,7 @@
           <a:lstStyle/>
           <a:p>
             <a:r>
-              <a:t>Demonstrar a pesquisa por 'WooCommerce'. Alertar os alunos para checarem se o autor e a Automattic e se ha mais de 5 milhoes de instalacoes ativas.</a:t>
+              <a:t>Passo a passo no painel: mostrar onde fica o menu lateral de Plugins e o botao 'Adicionar Novo' que conecta ao repositorio oficial.</a:t>
             </a:r>
           </a:p>
         </p:txBody>
@@ -1149,6 +1147,11 @@
         <p:spPr/>
       </p:sp>
     </p:spTree>
+    <p:extLst>
+      <p:ext uri="{BB962C8B-B14F-4D97-AF65-F5344CB8AC3E}">
+        <p14:creationId xmlns:p14="http://schemas.microsoft.com/office/powerpoint/2010/main" val="670156512"/>
+      </p:ext>
+    </p:extLst>
   </p:cSld>
   <p:clrMapOvr>
     <a:masterClrMapping/>
@@ -1201,7 +1204,7 @@
           <a:lstStyle/>
           <a:p>
             <a:r>
-              <a:t>Explicar os 3 estados do botao: Instalar Agora, Instalando (download e descompactacao em /wp-content/plugins/) e Ativar (criacao das tabelas no MySQL).</a:t>
+              <a:t>Mostrar as 4 paginas essenciais criadas automaticamente (Loja, Carrinho, Finalizar Compra e Minha Conta) e alertar severamente para jamais exclui-las.</a:t>
             </a:r>
           </a:p>
         </p:txBody>
@@ -1271,7 +1274,7 @@
           <a:lstStyle/>
           <a:p>
             <a:r>
-              <a:t>Guiar os alunos pelo Assistente Inicial (Setup Wizard). Mostrar a importancia de definir Brasil e a moeda Real (R$ BRL) logo de inicio.</a:t>
+              <a:t>Explicar a separacao logica no painel do WordPress entre o menu 'WooCommerce' (operacoes, pedidos e clientes) e o menu 'Produtos' (catalogo).</a:t>
             </a:r>
           </a:p>
         </p:txBody>
@@ -1411,7 +1414,7 @@
           <a:lstStyle/>
           <a:p>
             <a:r>
-              <a:t>Mostrar as 4 paginas essenciais criadas automaticamente (Loja, Carrinho, Finalizar Compra e Minha Conta) e alertar severamente para jamais exclui-las.</a:t>
+              <a:t>Passar pelas Configuracoes Gerais: endereco fisico da loja para frete, restricao de venda apenas para o Brasil e formatacao correta da moeda BRL.</a:t>
             </a:r>
           </a:p>
         </p:txBody>
@@ -1481,7 +1484,7 @@
           <a:lstStyle/>
           <a:p>
             <a:r>
-              <a:t>Explicar a separacao logica no painel do WordPress entre o menu 'WooCommerce' (operacoes, pedidos e clientes) e o menu 'Produtos' (catalogo).</a:t>
+              <a:t>Atencao total nesta aula para as Unidades de Medida: Peso SEMPRE em 'kg' e Dimensoes SEMPRE em 'cm'. Explicar o erro catastrofico que ocorre se cadastrar gramas como kg.</a:t>
             </a:r>
           </a:p>
         </p:txBody>
@@ -1551,7 +1554,7 @@
           <a:lstStyle/>
           <a:p>
             <a:r>
-              <a:t>Passar pelas Configuracoes Gerais: endereco fisico da loja para frete, restricao de venda apenas para o Brasil e formatacao correta da moeda BRL.</a:t>
+              <a:t>Explicar o fluxo de e-mails transacionais automaticos enviados pelo WooCommerce para cliente e lojista em cada etapa do pedido.</a:t>
             </a:r>
           </a:p>
         </p:txBody>
@@ -1621,7 +1624,7 @@
           <a:lstStyle/>
           <a:p>
             <a:r>
-              <a:t>Atencao total nesta aula para as Unidades de Medida: Peso SEMPRE em 'kg' e Dimensoes SEMPRE em 'cm'. Explicar o erro catastrofico que ocorre se cadastrar gramas como kg.</a:t>
+              <a:t>Mostrar aos alunos como acessar 'WooCommerce &gt; Status' para auditar a saude do servidor e confirmar que todos os itens estao verdes.</a:t>
             </a:r>
           </a:p>
         </p:txBody>
@@ -1691,7 +1694,7 @@
           <a:lstStyle/>
           <a:p>
             <a:r>
-              <a:t>Explicar o fluxo de e-mails transacionais automaticos enviados pelo WooCommerce para cliente e lojista em cada etapa do pedido.</a:t>
+              <a:t>Abordar seguranca e performance: regras de cache para e-commerce (nunca cachear carrinho/checkout), backups diarios e autenticacao em dois fatores.</a:t>
             </a:r>
           </a:p>
         </p:txBody>
@@ -1717,146 +1720,6 @@
 </file>
 
 <file path=ppt/notesSlides/notesSlide25.xml><?xml version="1.0" encoding="utf-8"?>
-<p:notes xmlns:a="http://schemas.openxmlformats.org/drawingml/2006/main" xmlns:r="http://schemas.openxmlformats.org/officeDocument/2006/relationships" xmlns:p="http://schemas.openxmlformats.org/presentationml/2006/main">
-  <p:cSld>
-    <p:spTree>
-      <p:nvGrpSpPr>
-        <p:cNvPr id="1" name=""/>
-        <p:cNvGrpSpPr/>
-        <p:nvPr/>
-      </p:nvGrpSpPr>
-      <p:grpSpPr>
-        <a:xfrm>
-          <a:off x="0" y="0"/>
-          <a:ext cx="0" cy="0"/>
-          <a:chOff x="0" y="0"/>
-          <a:chExt cx="0" cy="0"/>
-        </a:xfrm>
-      </p:grpSpPr>
-      <p:sp>
-        <p:nvSpPr>
-          <p:cNvPr id="2" name="Slide Image Placeholder 1"/>
-          <p:cNvSpPr>
-            <a:spLocks noGrp="1" noRot="1" noChangeAspect="1"/>
-          </p:cNvSpPr>
-          <p:nvPr>
-            <p:ph type="sldImg" idx="2"/>
-          </p:nvPr>
-        </p:nvSpPr>
-        <p:spPr/>
-      </p:sp>
-      <p:sp>
-        <p:nvSpPr>
-          <p:cNvPr id="3" name="Notes Placeholder 2"/>
-          <p:cNvSpPr>
-            <a:spLocks noGrp="1"/>
-          </p:cNvSpPr>
-          <p:nvPr>
-            <p:ph type="body" sz="quarter" idx="3"/>
-          </p:nvPr>
-        </p:nvSpPr>
-        <p:spPr/>
-        <p:txBody>
-          <a:bodyPr/>
-          <a:lstStyle/>
-          <a:p>
-            <a:r>
-              <a:t>Mostrar aos alunos como acessar 'WooCommerce &gt; Status' para auditar a saude do servidor e confirmar que todos os itens estao verdes.</a:t>
-            </a:r>
-          </a:p>
-        </p:txBody>
-      </p:sp>
-      <p:sp>
-        <p:nvSpPr>
-          <p:cNvPr id="4" name="Slide Number Placeholder 3"/>
-          <p:cNvSpPr>
-            <a:spLocks noGrp="1"/>
-          </p:cNvSpPr>
-          <p:nvPr>
-            <p:ph type="sldNum" sz="quarter" idx="5"/>
-          </p:nvPr>
-        </p:nvSpPr>
-        <p:spPr/>
-      </p:sp>
-    </p:spTree>
-  </p:cSld>
-  <p:clrMapOvr>
-    <a:masterClrMapping/>
-  </p:clrMapOvr>
-</p:notes>
-</file>
-
-<file path=ppt/notesSlides/notesSlide26.xml><?xml version="1.0" encoding="utf-8"?>
-<p:notes xmlns:a="http://schemas.openxmlformats.org/drawingml/2006/main" xmlns:r="http://schemas.openxmlformats.org/officeDocument/2006/relationships" xmlns:p="http://schemas.openxmlformats.org/presentationml/2006/main">
-  <p:cSld>
-    <p:spTree>
-      <p:nvGrpSpPr>
-        <p:cNvPr id="1" name=""/>
-        <p:cNvGrpSpPr/>
-        <p:nvPr/>
-      </p:nvGrpSpPr>
-      <p:grpSpPr>
-        <a:xfrm>
-          <a:off x="0" y="0"/>
-          <a:ext cx="0" cy="0"/>
-          <a:chOff x="0" y="0"/>
-          <a:chExt cx="0" cy="0"/>
-        </a:xfrm>
-      </p:grpSpPr>
-      <p:sp>
-        <p:nvSpPr>
-          <p:cNvPr id="2" name="Slide Image Placeholder 1"/>
-          <p:cNvSpPr>
-            <a:spLocks noGrp="1" noRot="1" noChangeAspect="1"/>
-          </p:cNvSpPr>
-          <p:nvPr>
-            <p:ph type="sldImg" idx="2"/>
-          </p:nvPr>
-        </p:nvSpPr>
-        <p:spPr/>
-      </p:sp>
-      <p:sp>
-        <p:nvSpPr>
-          <p:cNvPr id="3" name="Notes Placeholder 2"/>
-          <p:cNvSpPr>
-            <a:spLocks noGrp="1"/>
-          </p:cNvSpPr>
-          <p:nvPr>
-            <p:ph type="body" sz="quarter" idx="3"/>
-          </p:nvPr>
-        </p:nvSpPr>
-        <p:spPr/>
-        <p:txBody>
-          <a:bodyPr/>
-          <a:lstStyle/>
-          <a:p>
-            <a:r>
-              <a:t>Abordar seguranca e performance: regras de cache para e-commerce (nunca cachear carrinho/checkout), backups diarios e autenticacao em dois fatores.</a:t>
-            </a:r>
-          </a:p>
-        </p:txBody>
-      </p:sp>
-      <p:sp>
-        <p:nvSpPr>
-          <p:cNvPr id="4" name="Slide Number Placeholder 3"/>
-          <p:cNvSpPr>
-            <a:spLocks noGrp="1"/>
-          </p:cNvSpPr>
-          <p:nvPr>
-            <p:ph type="sldNum" sz="quarter" idx="5"/>
-          </p:nvPr>
-        </p:nvSpPr>
-        <p:spPr/>
-      </p:sp>
-    </p:spTree>
-  </p:cSld>
-  <p:clrMapOvr>
-    <a:masterClrMapping/>
-  </p:clrMapOvr>
-</p:notes>
-</file>
-
-<file path=ppt/notesSlides/notesSlide27.xml><?xml version="1.0" encoding="utf-8"?>
 <p:notes xmlns:a="http://schemas.openxmlformats.org/drawingml/2006/main" xmlns:r="http://schemas.openxmlformats.org/officeDocument/2006/relationships" xmlns:p="http://schemas.openxmlformats.org/presentationml/2006/main">
   <p:cSld>
     <p:spTree>
@@ -8739,9 +8602,64 @@
           <a:chExt cx="0" cy="0"/>
         </a:xfrm>
       </p:grpSpPr>
+      <p:sp>
+        <p:nvSpPr>
+          <p:cNvPr id="6" name="Retângulo 5">
+            <a:extLst>
+              <a:ext uri="{FF2B5EF4-FFF2-40B4-BE49-F238E27FC236}">
+                <a16:creationId xmlns:a16="http://schemas.microsoft.com/office/drawing/2014/main" id="{8DC220E4-CDF2-B2FC-8D4C-30090C957200}"/>
+              </a:ext>
+            </a:extLst>
+          </p:cNvPr>
+          <p:cNvSpPr/>
+          <p:nvPr/>
+        </p:nvSpPr>
+        <p:spPr>
+          <a:xfrm>
+            <a:off x="0" y="0"/>
+            <a:ext cx="12192000" cy="6858000"/>
+          </a:xfrm>
+          <a:prstGeom prst="rect">
+            <a:avLst/>
+          </a:prstGeom>
+          <a:solidFill>
+            <a:srgbClr val="0F172A"/>
+          </a:solidFill>
+        </p:spPr>
+        <p:style>
+          <a:lnRef idx="2">
+            <a:schemeClr val="accent1">
+              <a:shade val="15000"/>
+            </a:schemeClr>
+          </a:lnRef>
+          <a:fillRef idx="1">
+            <a:schemeClr val="accent1"/>
+          </a:fillRef>
+          <a:effectRef idx="0">
+            <a:schemeClr val="accent1"/>
+          </a:effectRef>
+          <a:fontRef idx="minor">
+            <a:schemeClr val="lt1"/>
+          </a:fontRef>
+        </p:style>
+        <p:txBody>
+          <a:bodyPr rtlCol="0" anchor="ctr"/>
+          <a:lstStyle/>
+          <a:p>
+            <a:pPr algn="ctr"/>
+            <a:endParaRPr lang="en-US"/>
+          </a:p>
+        </p:txBody>
+      </p:sp>
       <p:pic>
         <p:nvPicPr>
-          <p:cNvPr id="2" name="Picture 1" descr="mod8_slide5.png"/>
+          <p:cNvPr id="4" name="Imagem 3">
+            <a:extLst>
+              <a:ext uri="{FF2B5EF4-FFF2-40B4-BE49-F238E27FC236}">
+                <a16:creationId xmlns:a16="http://schemas.microsoft.com/office/drawing/2014/main" id="{643DDF00-CE5D-71F9-23A7-2F459765EABD}"/>
+              </a:ext>
+            </a:extLst>
+          </p:cNvPr>
           <p:cNvPicPr>
             <a:picLocks noChangeAspect="1"/>
           </p:cNvPicPr>
@@ -8755,15 +8673,66 @@
         </p:blipFill>
         <p:spPr>
           <a:xfrm>
-            <a:off x="0" y="0"/>
-            <a:ext cx="12192000" cy="6858000"/>
+            <a:off x="613775" y="0"/>
+            <a:ext cx="11085536" cy="6858000"/>
           </a:xfrm>
           <a:prstGeom prst="rect">
             <a:avLst/>
           </a:prstGeom>
         </p:spPr>
       </p:pic>
+      <p:sp>
+        <p:nvSpPr>
+          <p:cNvPr id="5" name="Seta: para Baixo 4">
+            <a:extLst>
+              <a:ext uri="{FF2B5EF4-FFF2-40B4-BE49-F238E27FC236}">
+                <a16:creationId xmlns:a16="http://schemas.microsoft.com/office/drawing/2014/main" id="{D1FD8449-187F-2509-9696-7AB0E32E516B}"/>
+              </a:ext>
+            </a:extLst>
+          </p:cNvPr>
+          <p:cNvSpPr/>
+          <p:nvPr/>
+        </p:nvSpPr>
+        <p:spPr>
+          <a:xfrm rot="16200000">
+            <a:off x="2918570" y="742168"/>
+            <a:ext cx="1716066" cy="2242159"/>
+          </a:xfrm>
+          <a:prstGeom prst="downArrow">
+            <a:avLst/>
+          </a:prstGeom>
+        </p:spPr>
+        <p:style>
+          <a:lnRef idx="2">
+            <a:schemeClr val="accent6">
+              <a:shade val="15000"/>
+            </a:schemeClr>
+          </a:lnRef>
+          <a:fillRef idx="1">
+            <a:schemeClr val="accent6"/>
+          </a:fillRef>
+          <a:effectRef idx="0">
+            <a:schemeClr val="accent6"/>
+          </a:effectRef>
+          <a:fontRef idx="minor">
+            <a:schemeClr val="lt1"/>
+          </a:fontRef>
+        </p:style>
+        <p:txBody>
+          <a:bodyPr rtlCol="0" anchor="ctr"/>
+          <a:lstStyle/>
+          <a:p>
+            <a:pPr algn="ctr"/>
+            <a:endParaRPr lang="en-US"/>
+          </a:p>
+        </p:txBody>
+      </p:sp>
     </p:spTree>
+    <p:extLst>
+      <p:ext uri="{BB962C8B-B14F-4D97-AF65-F5344CB8AC3E}">
+        <p14:creationId xmlns:p14="http://schemas.microsoft.com/office/powerpoint/2010/main" val="3136051527"/>
+      </p:ext>
+    </p:extLst>
   </p:cSld>
   <p:clrMapOvr>
     <a:masterClrMapping/>
@@ -8790,7 +8759,7 @@
       </p:grpSpPr>
       <p:pic>
         <p:nvPicPr>
-          <p:cNvPr id="2" name="Picture 1" descr="mod8_slide6.png"/>
+          <p:cNvPr id="2" name="Picture 1" descr="mod8_slide8.png"/>
           <p:cNvPicPr>
             <a:picLocks noChangeAspect="1"/>
           </p:cNvPicPr>
@@ -8839,7 +8808,7 @@
       </p:grpSpPr>
       <p:pic>
         <p:nvPicPr>
-          <p:cNvPr id="2" name="Picture 1" descr="mod8_slide7.png"/>
+          <p:cNvPr id="2" name="Picture 1" descr="mod8_slide9.png"/>
           <p:cNvPicPr>
             <a:picLocks noChangeAspect="1"/>
           </p:cNvPicPr>
@@ -8937,7 +8906,7 @@
       </p:grpSpPr>
       <p:pic>
         <p:nvPicPr>
-          <p:cNvPr id="2" name="Picture 1" descr="mod8_slide8.png"/>
+          <p:cNvPr id="2" name="Picture 1" descr="mod8_slide10.png"/>
           <p:cNvPicPr>
             <a:picLocks noChangeAspect="1"/>
           </p:cNvPicPr>
@@ -8986,7 +8955,7 @@
       </p:grpSpPr>
       <p:pic>
         <p:nvPicPr>
-          <p:cNvPr id="2" name="Picture 1" descr="mod8_slide9.png"/>
+          <p:cNvPr id="2" name="Picture 1" descr="mod8_slide11.png"/>
           <p:cNvPicPr>
             <a:picLocks noChangeAspect="1"/>
           </p:cNvPicPr>
@@ -9035,7 +9004,7 @@
       </p:grpSpPr>
       <p:pic>
         <p:nvPicPr>
-          <p:cNvPr id="2" name="Picture 1" descr="mod8_slide10.png"/>
+          <p:cNvPr id="2" name="Picture 1" descr="mod8_slide12.png"/>
           <p:cNvPicPr>
             <a:picLocks noChangeAspect="1"/>
           </p:cNvPicPr>
@@ -9084,7 +9053,7 @@
       </p:grpSpPr>
       <p:pic>
         <p:nvPicPr>
-          <p:cNvPr id="2" name="Picture 1" descr="mod8_slide11.png"/>
+          <p:cNvPr id="2" name="Picture 1" descr="mod8_slide13.png"/>
           <p:cNvPicPr>
             <a:picLocks noChangeAspect="1"/>
           </p:cNvPicPr>
@@ -9133,7 +9102,7 @@
       </p:grpSpPr>
       <p:pic>
         <p:nvPicPr>
-          <p:cNvPr id="2" name="Picture 1" descr="mod8_slide12.png"/>
+          <p:cNvPr id="2" name="Picture 1" descr="mod8_slide14.png"/>
           <p:cNvPicPr>
             <a:picLocks noChangeAspect="1"/>
           </p:cNvPicPr>
@@ -9164,104 +9133,6 @@
 </file>
 
 <file path=ppt/slides/slide25.xml><?xml version="1.0" encoding="utf-8"?>
-<p:sld xmlns:a="http://schemas.openxmlformats.org/drawingml/2006/main" xmlns:r="http://schemas.openxmlformats.org/officeDocument/2006/relationships" xmlns:p="http://schemas.openxmlformats.org/presentationml/2006/main">
-  <p:cSld>
-    <p:spTree>
-      <p:nvGrpSpPr>
-        <p:cNvPr id="1" name=""/>
-        <p:cNvGrpSpPr/>
-        <p:nvPr/>
-      </p:nvGrpSpPr>
-      <p:grpSpPr>
-        <a:xfrm>
-          <a:off x="0" y="0"/>
-          <a:ext cx="0" cy="0"/>
-          <a:chOff x="0" y="0"/>
-          <a:chExt cx="0" cy="0"/>
-        </a:xfrm>
-      </p:grpSpPr>
-      <p:pic>
-        <p:nvPicPr>
-          <p:cNvPr id="2" name="Picture 1" descr="mod8_slide13.png"/>
-          <p:cNvPicPr>
-            <a:picLocks noChangeAspect="1"/>
-          </p:cNvPicPr>
-          <p:nvPr/>
-        </p:nvPicPr>
-        <p:blipFill>
-          <a:blip r:embed="rId3"/>
-          <a:stretch>
-            <a:fillRect/>
-          </a:stretch>
-        </p:blipFill>
-        <p:spPr>
-          <a:xfrm>
-            <a:off x="0" y="0"/>
-            <a:ext cx="12192000" cy="6858000"/>
-          </a:xfrm>
-          <a:prstGeom prst="rect">
-            <a:avLst/>
-          </a:prstGeom>
-        </p:spPr>
-      </p:pic>
-    </p:spTree>
-  </p:cSld>
-  <p:clrMapOvr>
-    <a:masterClrMapping/>
-  </p:clrMapOvr>
-</p:sld>
-</file>
-
-<file path=ppt/slides/slide26.xml><?xml version="1.0" encoding="utf-8"?>
-<p:sld xmlns:a="http://schemas.openxmlformats.org/drawingml/2006/main" xmlns:r="http://schemas.openxmlformats.org/officeDocument/2006/relationships" xmlns:p="http://schemas.openxmlformats.org/presentationml/2006/main">
-  <p:cSld>
-    <p:spTree>
-      <p:nvGrpSpPr>
-        <p:cNvPr id="1" name=""/>
-        <p:cNvGrpSpPr/>
-        <p:nvPr/>
-      </p:nvGrpSpPr>
-      <p:grpSpPr>
-        <a:xfrm>
-          <a:off x="0" y="0"/>
-          <a:ext cx="0" cy="0"/>
-          <a:chOff x="0" y="0"/>
-          <a:chExt cx="0" cy="0"/>
-        </a:xfrm>
-      </p:grpSpPr>
-      <p:pic>
-        <p:nvPicPr>
-          <p:cNvPr id="2" name="Picture 1" descr="mod8_slide14.png"/>
-          <p:cNvPicPr>
-            <a:picLocks noChangeAspect="1"/>
-          </p:cNvPicPr>
-          <p:nvPr/>
-        </p:nvPicPr>
-        <p:blipFill>
-          <a:blip r:embed="rId3"/>
-          <a:stretch>
-            <a:fillRect/>
-          </a:stretch>
-        </p:blipFill>
-        <p:spPr>
-          <a:xfrm>
-            <a:off x="0" y="0"/>
-            <a:ext cx="12192000" cy="6858000"/>
-          </a:xfrm>
-          <a:prstGeom prst="rect">
-            <a:avLst/>
-          </a:prstGeom>
-        </p:spPr>
-      </p:pic>
-    </p:spTree>
-  </p:cSld>
-  <p:clrMapOvr>
-    <a:masterClrMapping/>
-  </p:clrMapOvr>
-</p:sld>
-</file>
-
-<file path=ppt/slides/slide27.xml><?xml version="1.0" encoding="utf-8"?>
 <p:sld xmlns:a="http://schemas.openxmlformats.org/drawingml/2006/main" xmlns:r="http://schemas.openxmlformats.org/officeDocument/2006/relationships" xmlns:p="http://schemas.openxmlformats.org/presentationml/2006/main">
   <p:cSld>
     <p:spTree>

--- a/8 instalacao de woocomerce.pptx
+++ b/8 instalacao de woocomerce.pptx
@@ -5,7 +5,7 @@
     <p:sldMasterId id="2147483718" r:id="rId1"/>
   </p:sldMasterIdLst>
   <p:notesMasterIdLst>
-    <p:notesMasterId r:id="rId27"/>
+    <p:notesMasterId r:id="rId20"/>
   </p:notesMasterIdLst>
   <p:sldIdLst>
     <p:sldId id="256" r:id="rId2"/>
@@ -25,14 +25,7 @@
     <p:sldId id="280" r:id="rId16"/>
     <p:sldId id="282" r:id="rId17"/>
     <p:sldId id="283" r:id="rId18"/>
-    <p:sldId id="263" r:id="rId19"/>
-    <p:sldId id="264" r:id="rId20"/>
-    <p:sldId id="265" r:id="rId21"/>
-    <p:sldId id="266" r:id="rId22"/>
-    <p:sldId id="267" r:id="rId23"/>
-    <p:sldId id="268" r:id="rId24"/>
-    <p:sldId id="269" r:id="rId25"/>
-    <p:sldId id="270" r:id="rId26"/>
+    <p:sldId id="284" r:id="rId19"/>
   </p:sldIdLst>
   <p:sldSz cx="12192000" cy="6858000"/>
   <p:notesSz cx="6858000" cy="9144000"/>
@@ -1204,7 +1197,7 @@
           <a:lstStyle/>
           <a:p>
             <a:r>
-              <a:t>Mostrar as 4 paginas essenciais criadas automaticamente (Loja, Carrinho, Finalizar Compra e Minha Conta) e alertar severamente para jamais exclui-las.</a:t>
+              <a:t>Passo a passo no painel: mostrar onde fica o menu lateral de Plugins e o botao 'Adicionar Novo' que conecta ao repositorio oficial.</a:t>
             </a:r>
           </a:p>
         </p:txBody>
@@ -1222,76 +1215,11 @@
         <p:spPr/>
       </p:sp>
     </p:spTree>
-  </p:cSld>
-  <p:clrMapOvr>
-    <a:masterClrMapping/>
-  </p:clrMapOvr>
-</p:notes>
-</file>
-
-<file path=ppt/notesSlides/notesSlide19.xml><?xml version="1.0" encoding="utf-8"?>
-<p:notes xmlns:a="http://schemas.openxmlformats.org/drawingml/2006/main" xmlns:r="http://schemas.openxmlformats.org/officeDocument/2006/relationships" xmlns:p="http://schemas.openxmlformats.org/presentationml/2006/main">
-  <p:cSld>
-    <p:spTree>
-      <p:nvGrpSpPr>
-        <p:cNvPr id="1" name=""/>
-        <p:cNvGrpSpPr/>
-        <p:nvPr/>
-      </p:nvGrpSpPr>
-      <p:grpSpPr>
-        <a:xfrm>
-          <a:off x="0" y="0"/>
-          <a:ext cx="0" cy="0"/>
-          <a:chOff x="0" y="0"/>
-          <a:chExt cx="0" cy="0"/>
-        </a:xfrm>
-      </p:grpSpPr>
-      <p:sp>
-        <p:nvSpPr>
-          <p:cNvPr id="2" name="Slide Image Placeholder 1"/>
-          <p:cNvSpPr>
-            <a:spLocks noGrp="1" noRot="1" noChangeAspect="1"/>
-          </p:cNvSpPr>
-          <p:nvPr>
-            <p:ph type="sldImg" idx="2"/>
-          </p:nvPr>
-        </p:nvSpPr>
-        <p:spPr/>
-      </p:sp>
-      <p:sp>
-        <p:nvSpPr>
-          <p:cNvPr id="3" name="Notes Placeholder 2"/>
-          <p:cNvSpPr>
-            <a:spLocks noGrp="1"/>
-          </p:cNvSpPr>
-          <p:nvPr>
-            <p:ph type="body" sz="quarter" idx="3"/>
-          </p:nvPr>
-        </p:nvSpPr>
-        <p:spPr/>
-        <p:txBody>
-          <a:bodyPr/>
-          <a:lstStyle/>
-          <a:p>
-            <a:r>
-              <a:t>Explicar a separacao logica no painel do WordPress entre o menu 'WooCommerce' (operacoes, pedidos e clientes) e o menu 'Produtos' (catalogo).</a:t>
-            </a:r>
-          </a:p>
-        </p:txBody>
-      </p:sp>
-      <p:sp>
-        <p:nvSpPr>
-          <p:cNvPr id="4" name="Slide Number Placeholder 3"/>
-          <p:cNvSpPr>
-            <a:spLocks noGrp="1"/>
-          </p:cNvSpPr>
-          <p:nvPr>
-            <p:ph type="sldNum" sz="quarter" idx="5"/>
-          </p:nvPr>
-        </p:nvSpPr>
-        <p:spPr/>
-      </p:sp>
-    </p:spTree>
+    <p:extLst>
+      <p:ext uri="{BB962C8B-B14F-4D97-AF65-F5344CB8AC3E}">
+        <p14:creationId xmlns:p14="http://schemas.microsoft.com/office/powerpoint/2010/main" val="2947455642"/>
+      </p:ext>
+    </p:extLst>
   </p:cSld>
   <p:clrMapOvr>
     <a:masterClrMapping/>
@@ -1345,426 +1273,6 @@
           <a:p>
             <a:r>
               <a:t>Explicar a arquitetura em camadas do WooCommerce e por que ele e lider absoluto no mercado global de e-commerce, destacando a posse real dos dados e a ausencia de comissoes por venda.</a:t>
-            </a:r>
-          </a:p>
-        </p:txBody>
-      </p:sp>
-      <p:sp>
-        <p:nvSpPr>
-          <p:cNvPr id="4" name="Slide Number Placeholder 3"/>
-          <p:cNvSpPr>
-            <a:spLocks noGrp="1"/>
-          </p:cNvSpPr>
-          <p:nvPr>
-            <p:ph type="sldNum" sz="quarter" idx="5"/>
-          </p:nvPr>
-        </p:nvSpPr>
-        <p:spPr/>
-      </p:sp>
-    </p:spTree>
-  </p:cSld>
-  <p:clrMapOvr>
-    <a:masterClrMapping/>
-  </p:clrMapOvr>
-</p:notes>
-</file>
-
-<file path=ppt/notesSlides/notesSlide20.xml><?xml version="1.0" encoding="utf-8"?>
-<p:notes xmlns:a="http://schemas.openxmlformats.org/drawingml/2006/main" xmlns:r="http://schemas.openxmlformats.org/officeDocument/2006/relationships" xmlns:p="http://schemas.openxmlformats.org/presentationml/2006/main">
-  <p:cSld>
-    <p:spTree>
-      <p:nvGrpSpPr>
-        <p:cNvPr id="1" name=""/>
-        <p:cNvGrpSpPr/>
-        <p:nvPr/>
-      </p:nvGrpSpPr>
-      <p:grpSpPr>
-        <a:xfrm>
-          <a:off x="0" y="0"/>
-          <a:ext cx="0" cy="0"/>
-          <a:chOff x="0" y="0"/>
-          <a:chExt cx="0" cy="0"/>
-        </a:xfrm>
-      </p:grpSpPr>
-      <p:sp>
-        <p:nvSpPr>
-          <p:cNvPr id="2" name="Slide Image Placeholder 1"/>
-          <p:cNvSpPr>
-            <a:spLocks noGrp="1" noRot="1" noChangeAspect="1"/>
-          </p:cNvSpPr>
-          <p:nvPr>
-            <p:ph type="sldImg" idx="2"/>
-          </p:nvPr>
-        </p:nvSpPr>
-        <p:spPr/>
-      </p:sp>
-      <p:sp>
-        <p:nvSpPr>
-          <p:cNvPr id="3" name="Notes Placeholder 2"/>
-          <p:cNvSpPr>
-            <a:spLocks noGrp="1"/>
-          </p:cNvSpPr>
-          <p:nvPr>
-            <p:ph type="body" sz="quarter" idx="3"/>
-          </p:nvPr>
-        </p:nvSpPr>
-        <p:spPr/>
-        <p:txBody>
-          <a:bodyPr/>
-          <a:lstStyle/>
-          <a:p>
-            <a:r>
-              <a:t>Passar pelas Configuracoes Gerais: endereco fisico da loja para frete, restricao de venda apenas para o Brasil e formatacao correta da moeda BRL.</a:t>
-            </a:r>
-          </a:p>
-        </p:txBody>
-      </p:sp>
-      <p:sp>
-        <p:nvSpPr>
-          <p:cNvPr id="4" name="Slide Number Placeholder 3"/>
-          <p:cNvSpPr>
-            <a:spLocks noGrp="1"/>
-          </p:cNvSpPr>
-          <p:nvPr>
-            <p:ph type="sldNum" sz="quarter" idx="5"/>
-          </p:nvPr>
-        </p:nvSpPr>
-        <p:spPr/>
-      </p:sp>
-    </p:spTree>
-  </p:cSld>
-  <p:clrMapOvr>
-    <a:masterClrMapping/>
-  </p:clrMapOvr>
-</p:notes>
-</file>
-
-<file path=ppt/notesSlides/notesSlide21.xml><?xml version="1.0" encoding="utf-8"?>
-<p:notes xmlns:a="http://schemas.openxmlformats.org/drawingml/2006/main" xmlns:r="http://schemas.openxmlformats.org/officeDocument/2006/relationships" xmlns:p="http://schemas.openxmlformats.org/presentationml/2006/main">
-  <p:cSld>
-    <p:spTree>
-      <p:nvGrpSpPr>
-        <p:cNvPr id="1" name=""/>
-        <p:cNvGrpSpPr/>
-        <p:nvPr/>
-      </p:nvGrpSpPr>
-      <p:grpSpPr>
-        <a:xfrm>
-          <a:off x="0" y="0"/>
-          <a:ext cx="0" cy="0"/>
-          <a:chOff x="0" y="0"/>
-          <a:chExt cx="0" cy="0"/>
-        </a:xfrm>
-      </p:grpSpPr>
-      <p:sp>
-        <p:nvSpPr>
-          <p:cNvPr id="2" name="Slide Image Placeholder 1"/>
-          <p:cNvSpPr>
-            <a:spLocks noGrp="1" noRot="1" noChangeAspect="1"/>
-          </p:cNvSpPr>
-          <p:nvPr>
-            <p:ph type="sldImg" idx="2"/>
-          </p:nvPr>
-        </p:nvSpPr>
-        <p:spPr/>
-      </p:sp>
-      <p:sp>
-        <p:nvSpPr>
-          <p:cNvPr id="3" name="Notes Placeholder 2"/>
-          <p:cNvSpPr>
-            <a:spLocks noGrp="1"/>
-          </p:cNvSpPr>
-          <p:nvPr>
-            <p:ph type="body" sz="quarter" idx="3"/>
-          </p:nvPr>
-        </p:nvSpPr>
-        <p:spPr/>
-        <p:txBody>
-          <a:bodyPr/>
-          <a:lstStyle/>
-          <a:p>
-            <a:r>
-              <a:t>Atencao total nesta aula para as Unidades de Medida: Peso SEMPRE em 'kg' e Dimensoes SEMPRE em 'cm'. Explicar o erro catastrofico que ocorre se cadastrar gramas como kg.</a:t>
-            </a:r>
-          </a:p>
-        </p:txBody>
-      </p:sp>
-      <p:sp>
-        <p:nvSpPr>
-          <p:cNvPr id="4" name="Slide Number Placeholder 3"/>
-          <p:cNvSpPr>
-            <a:spLocks noGrp="1"/>
-          </p:cNvSpPr>
-          <p:nvPr>
-            <p:ph type="sldNum" sz="quarter" idx="5"/>
-          </p:nvPr>
-        </p:nvSpPr>
-        <p:spPr/>
-      </p:sp>
-    </p:spTree>
-  </p:cSld>
-  <p:clrMapOvr>
-    <a:masterClrMapping/>
-  </p:clrMapOvr>
-</p:notes>
-</file>
-
-<file path=ppt/notesSlides/notesSlide22.xml><?xml version="1.0" encoding="utf-8"?>
-<p:notes xmlns:a="http://schemas.openxmlformats.org/drawingml/2006/main" xmlns:r="http://schemas.openxmlformats.org/officeDocument/2006/relationships" xmlns:p="http://schemas.openxmlformats.org/presentationml/2006/main">
-  <p:cSld>
-    <p:spTree>
-      <p:nvGrpSpPr>
-        <p:cNvPr id="1" name=""/>
-        <p:cNvGrpSpPr/>
-        <p:nvPr/>
-      </p:nvGrpSpPr>
-      <p:grpSpPr>
-        <a:xfrm>
-          <a:off x="0" y="0"/>
-          <a:ext cx="0" cy="0"/>
-          <a:chOff x="0" y="0"/>
-          <a:chExt cx="0" cy="0"/>
-        </a:xfrm>
-      </p:grpSpPr>
-      <p:sp>
-        <p:nvSpPr>
-          <p:cNvPr id="2" name="Slide Image Placeholder 1"/>
-          <p:cNvSpPr>
-            <a:spLocks noGrp="1" noRot="1" noChangeAspect="1"/>
-          </p:cNvSpPr>
-          <p:nvPr>
-            <p:ph type="sldImg" idx="2"/>
-          </p:nvPr>
-        </p:nvSpPr>
-        <p:spPr/>
-      </p:sp>
-      <p:sp>
-        <p:nvSpPr>
-          <p:cNvPr id="3" name="Notes Placeholder 2"/>
-          <p:cNvSpPr>
-            <a:spLocks noGrp="1"/>
-          </p:cNvSpPr>
-          <p:nvPr>
-            <p:ph type="body" sz="quarter" idx="3"/>
-          </p:nvPr>
-        </p:nvSpPr>
-        <p:spPr/>
-        <p:txBody>
-          <a:bodyPr/>
-          <a:lstStyle/>
-          <a:p>
-            <a:r>
-              <a:t>Explicar o fluxo de e-mails transacionais automaticos enviados pelo WooCommerce para cliente e lojista em cada etapa do pedido.</a:t>
-            </a:r>
-          </a:p>
-        </p:txBody>
-      </p:sp>
-      <p:sp>
-        <p:nvSpPr>
-          <p:cNvPr id="4" name="Slide Number Placeholder 3"/>
-          <p:cNvSpPr>
-            <a:spLocks noGrp="1"/>
-          </p:cNvSpPr>
-          <p:nvPr>
-            <p:ph type="sldNum" sz="quarter" idx="5"/>
-          </p:nvPr>
-        </p:nvSpPr>
-        <p:spPr/>
-      </p:sp>
-    </p:spTree>
-  </p:cSld>
-  <p:clrMapOvr>
-    <a:masterClrMapping/>
-  </p:clrMapOvr>
-</p:notes>
-</file>
-
-<file path=ppt/notesSlides/notesSlide23.xml><?xml version="1.0" encoding="utf-8"?>
-<p:notes xmlns:a="http://schemas.openxmlformats.org/drawingml/2006/main" xmlns:r="http://schemas.openxmlformats.org/officeDocument/2006/relationships" xmlns:p="http://schemas.openxmlformats.org/presentationml/2006/main">
-  <p:cSld>
-    <p:spTree>
-      <p:nvGrpSpPr>
-        <p:cNvPr id="1" name=""/>
-        <p:cNvGrpSpPr/>
-        <p:nvPr/>
-      </p:nvGrpSpPr>
-      <p:grpSpPr>
-        <a:xfrm>
-          <a:off x="0" y="0"/>
-          <a:ext cx="0" cy="0"/>
-          <a:chOff x="0" y="0"/>
-          <a:chExt cx="0" cy="0"/>
-        </a:xfrm>
-      </p:grpSpPr>
-      <p:sp>
-        <p:nvSpPr>
-          <p:cNvPr id="2" name="Slide Image Placeholder 1"/>
-          <p:cNvSpPr>
-            <a:spLocks noGrp="1" noRot="1" noChangeAspect="1"/>
-          </p:cNvSpPr>
-          <p:nvPr>
-            <p:ph type="sldImg" idx="2"/>
-          </p:nvPr>
-        </p:nvSpPr>
-        <p:spPr/>
-      </p:sp>
-      <p:sp>
-        <p:nvSpPr>
-          <p:cNvPr id="3" name="Notes Placeholder 2"/>
-          <p:cNvSpPr>
-            <a:spLocks noGrp="1"/>
-          </p:cNvSpPr>
-          <p:nvPr>
-            <p:ph type="body" sz="quarter" idx="3"/>
-          </p:nvPr>
-        </p:nvSpPr>
-        <p:spPr/>
-        <p:txBody>
-          <a:bodyPr/>
-          <a:lstStyle/>
-          <a:p>
-            <a:r>
-              <a:t>Mostrar aos alunos como acessar 'WooCommerce &gt; Status' para auditar a saude do servidor e confirmar que todos os itens estao verdes.</a:t>
-            </a:r>
-          </a:p>
-        </p:txBody>
-      </p:sp>
-      <p:sp>
-        <p:nvSpPr>
-          <p:cNvPr id="4" name="Slide Number Placeholder 3"/>
-          <p:cNvSpPr>
-            <a:spLocks noGrp="1"/>
-          </p:cNvSpPr>
-          <p:nvPr>
-            <p:ph type="sldNum" sz="quarter" idx="5"/>
-          </p:nvPr>
-        </p:nvSpPr>
-        <p:spPr/>
-      </p:sp>
-    </p:spTree>
-  </p:cSld>
-  <p:clrMapOvr>
-    <a:masterClrMapping/>
-  </p:clrMapOvr>
-</p:notes>
-</file>
-
-<file path=ppt/notesSlides/notesSlide24.xml><?xml version="1.0" encoding="utf-8"?>
-<p:notes xmlns:a="http://schemas.openxmlformats.org/drawingml/2006/main" xmlns:r="http://schemas.openxmlformats.org/officeDocument/2006/relationships" xmlns:p="http://schemas.openxmlformats.org/presentationml/2006/main">
-  <p:cSld>
-    <p:spTree>
-      <p:nvGrpSpPr>
-        <p:cNvPr id="1" name=""/>
-        <p:cNvGrpSpPr/>
-        <p:nvPr/>
-      </p:nvGrpSpPr>
-      <p:grpSpPr>
-        <a:xfrm>
-          <a:off x="0" y="0"/>
-          <a:ext cx="0" cy="0"/>
-          <a:chOff x="0" y="0"/>
-          <a:chExt cx="0" cy="0"/>
-        </a:xfrm>
-      </p:grpSpPr>
-      <p:sp>
-        <p:nvSpPr>
-          <p:cNvPr id="2" name="Slide Image Placeholder 1"/>
-          <p:cNvSpPr>
-            <a:spLocks noGrp="1" noRot="1" noChangeAspect="1"/>
-          </p:cNvSpPr>
-          <p:nvPr>
-            <p:ph type="sldImg" idx="2"/>
-          </p:nvPr>
-        </p:nvSpPr>
-        <p:spPr/>
-      </p:sp>
-      <p:sp>
-        <p:nvSpPr>
-          <p:cNvPr id="3" name="Notes Placeholder 2"/>
-          <p:cNvSpPr>
-            <a:spLocks noGrp="1"/>
-          </p:cNvSpPr>
-          <p:nvPr>
-            <p:ph type="body" sz="quarter" idx="3"/>
-          </p:nvPr>
-        </p:nvSpPr>
-        <p:spPr/>
-        <p:txBody>
-          <a:bodyPr/>
-          <a:lstStyle/>
-          <a:p>
-            <a:r>
-              <a:t>Abordar seguranca e performance: regras de cache para e-commerce (nunca cachear carrinho/checkout), backups diarios e autenticacao em dois fatores.</a:t>
-            </a:r>
-          </a:p>
-        </p:txBody>
-      </p:sp>
-      <p:sp>
-        <p:nvSpPr>
-          <p:cNvPr id="4" name="Slide Number Placeholder 3"/>
-          <p:cNvSpPr>
-            <a:spLocks noGrp="1"/>
-          </p:cNvSpPr>
-          <p:nvPr>
-            <p:ph type="sldNum" sz="quarter" idx="5"/>
-          </p:nvPr>
-        </p:nvSpPr>
-        <p:spPr/>
-      </p:sp>
-    </p:spTree>
-  </p:cSld>
-  <p:clrMapOvr>
-    <a:masterClrMapping/>
-  </p:clrMapOvr>
-</p:notes>
-</file>
-
-<file path=ppt/notesSlides/notesSlide25.xml><?xml version="1.0" encoding="utf-8"?>
-<p:notes xmlns:a="http://schemas.openxmlformats.org/drawingml/2006/main" xmlns:r="http://schemas.openxmlformats.org/officeDocument/2006/relationships" xmlns:p="http://schemas.openxmlformats.org/presentationml/2006/main">
-  <p:cSld>
-    <p:spTree>
-      <p:nvGrpSpPr>
-        <p:cNvPr id="1" name=""/>
-        <p:cNvGrpSpPr/>
-        <p:nvPr/>
-      </p:nvGrpSpPr>
-      <p:grpSpPr>
-        <a:xfrm>
-          <a:off x="0" y="0"/>
-          <a:ext cx="0" cy="0"/>
-          <a:chOff x="0" y="0"/>
-          <a:chExt cx="0" cy="0"/>
-        </a:xfrm>
-      </p:grpSpPr>
-      <p:sp>
-        <p:nvSpPr>
-          <p:cNvPr id="2" name="Slide Image Placeholder 1"/>
-          <p:cNvSpPr>
-            <a:spLocks noGrp="1" noRot="1" noChangeAspect="1"/>
-          </p:cNvSpPr>
-          <p:nvPr>
-            <p:ph type="sldImg" idx="2"/>
-          </p:nvPr>
-        </p:nvSpPr>
-        <p:spPr/>
-      </p:sp>
-      <p:sp>
-        <p:nvSpPr>
-          <p:cNvPr id="3" name="Notes Placeholder 2"/>
-          <p:cNvSpPr>
-            <a:spLocks noGrp="1"/>
-          </p:cNvSpPr>
-          <p:nvPr>
-            <p:ph type="body" sz="quarter" idx="3"/>
-          </p:nvPr>
-        </p:nvSpPr>
-        <p:spPr/>
-        <p:txBody>
-          <a:bodyPr/>
-          <a:lstStyle/>
-          <a:p>
-            <a:r>
-              <a:t>Revisao final com o checklist de conclusao do Modulo 8 e introducao do Modulo 9: Integracao com Mercado Livre e Mercado Pago.</a:t>
             </a:r>
           </a:p>
         </p:txBody>
@@ -8757,9 +8265,110 @@
           <a:chExt cx="0" cy="0"/>
         </a:xfrm>
       </p:grpSpPr>
+      <p:sp>
+        <p:nvSpPr>
+          <p:cNvPr id="6" name="Retângulo 5">
+            <a:extLst>
+              <a:ext uri="{FF2B5EF4-FFF2-40B4-BE49-F238E27FC236}">
+                <a16:creationId xmlns:a16="http://schemas.microsoft.com/office/drawing/2014/main" id="{8DC220E4-CDF2-B2FC-8D4C-30090C957200}"/>
+              </a:ext>
+            </a:extLst>
+          </p:cNvPr>
+          <p:cNvSpPr/>
+          <p:nvPr/>
+        </p:nvSpPr>
+        <p:spPr>
+          <a:xfrm>
+            <a:off x="0" y="0"/>
+            <a:ext cx="12192000" cy="6858000"/>
+          </a:xfrm>
+          <a:prstGeom prst="rect">
+            <a:avLst/>
+          </a:prstGeom>
+          <a:solidFill>
+            <a:srgbClr val="0F172A"/>
+          </a:solidFill>
+        </p:spPr>
+        <p:style>
+          <a:lnRef idx="2">
+            <a:schemeClr val="accent1">
+              <a:shade val="15000"/>
+            </a:schemeClr>
+          </a:lnRef>
+          <a:fillRef idx="1">
+            <a:schemeClr val="accent1"/>
+          </a:fillRef>
+          <a:effectRef idx="0">
+            <a:schemeClr val="accent1"/>
+          </a:effectRef>
+          <a:fontRef idx="minor">
+            <a:schemeClr val="lt1"/>
+          </a:fontRef>
+        </p:style>
+        <p:txBody>
+          <a:bodyPr rtlCol="0" anchor="ctr"/>
+          <a:lstStyle/>
+          <a:p>
+            <a:pPr algn="ctr"/>
+            <a:endParaRPr lang="en-US"/>
+          </a:p>
+        </p:txBody>
+      </p:sp>
+      <p:sp>
+        <p:nvSpPr>
+          <p:cNvPr id="5" name="Seta: para Baixo 4">
+            <a:extLst>
+              <a:ext uri="{FF2B5EF4-FFF2-40B4-BE49-F238E27FC236}">
+                <a16:creationId xmlns:a16="http://schemas.microsoft.com/office/drawing/2014/main" id="{D1FD8449-187F-2509-9696-7AB0E32E516B}"/>
+              </a:ext>
+            </a:extLst>
+          </p:cNvPr>
+          <p:cNvSpPr/>
+          <p:nvPr/>
+        </p:nvSpPr>
+        <p:spPr>
+          <a:xfrm rot="16200000">
+            <a:off x="2918570" y="742168"/>
+            <a:ext cx="1716066" cy="2242159"/>
+          </a:xfrm>
+          <a:prstGeom prst="downArrow">
+            <a:avLst/>
+          </a:prstGeom>
+        </p:spPr>
+        <p:style>
+          <a:lnRef idx="2">
+            <a:schemeClr val="accent6">
+              <a:shade val="15000"/>
+            </a:schemeClr>
+          </a:lnRef>
+          <a:fillRef idx="1">
+            <a:schemeClr val="accent6"/>
+          </a:fillRef>
+          <a:effectRef idx="0">
+            <a:schemeClr val="accent6"/>
+          </a:effectRef>
+          <a:fontRef idx="minor">
+            <a:schemeClr val="lt1"/>
+          </a:fontRef>
+        </p:style>
+        <p:txBody>
+          <a:bodyPr rtlCol="0" anchor="ctr"/>
+          <a:lstStyle/>
+          <a:p>
+            <a:pPr algn="ctr"/>
+            <a:endParaRPr lang="en-US"/>
+          </a:p>
+        </p:txBody>
+      </p:sp>
       <p:pic>
         <p:nvPicPr>
-          <p:cNvPr id="2" name="Picture 1" descr="mod8_slide8.png"/>
+          <p:cNvPr id="3" name="Imagem 2">
+            <a:extLst>
+              <a:ext uri="{FF2B5EF4-FFF2-40B4-BE49-F238E27FC236}">
+                <a16:creationId xmlns:a16="http://schemas.microsoft.com/office/drawing/2014/main" id="{A81FA535-1043-0638-2C60-C2059ED6B078}"/>
+              </a:ext>
+            </a:extLst>
+          </p:cNvPr>
           <p:cNvPicPr>
             <a:picLocks noChangeAspect="1"/>
           </p:cNvPicPr>
@@ -8773,64 +8382,112 @@
         </p:blipFill>
         <p:spPr>
           <a:xfrm>
-            <a:off x="0" y="0"/>
-            <a:ext cx="12192000" cy="6858000"/>
+            <a:off x="0" y="182880"/>
+            <a:ext cx="12192000" cy="6492240"/>
           </a:xfrm>
           <a:prstGeom prst="rect">
             <a:avLst/>
           </a:prstGeom>
         </p:spPr>
       </p:pic>
-    </p:spTree>
-  </p:cSld>
-  <p:clrMapOvr>
-    <a:masterClrMapping/>
-  </p:clrMapOvr>
-</p:sld>
-</file>
-
-<file path=ppt/slides/slide19.xml><?xml version="1.0" encoding="utf-8"?>
-<p:sld xmlns:a="http://schemas.openxmlformats.org/drawingml/2006/main" xmlns:r="http://schemas.openxmlformats.org/officeDocument/2006/relationships" xmlns:p="http://schemas.openxmlformats.org/presentationml/2006/main">
-  <p:cSld>
-    <p:spTree>
-      <p:nvGrpSpPr>
-        <p:cNvPr id="1" name=""/>
-        <p:cNvGrpSpPr/>
-        <p:nvPr/>
-      </p:nvGrpSpPr>
-      <p:grpSpPr>
-        <a:xfrm>
-          <a:off x="0" y="0"/>
-          <a:ext cx="0" cy="0"/>
-          <a:chOff x="0" y="0"/>
-          <a:chExt cx="0" cy="0"/>
-        </a:xfrm>
-      </p:grpSpPr>
-      <p:pic>
-        <p:nvPicPr>
-          <p:cNvPr id="2" name="Picture 1" descr="mod8_slide9.png"/>
-          <p:cNvPicPr>
-            <a:picLocks noChangeAspect="1"/>
-          </p:cNvPicPr>
+      <p:sp>
+        <p:nvSpPr>
+          <p:cNvPr id="7" name="Seta: para Baixo 6">
+            <a:extLst>
+              <a:ext uri="{FF2B5EF4-FFF2-40B4-BE49-F238E27FC236}">
+                <a16:creationId xmlns:a16="http://schemas.microsoft.com/office/drawing/2014/main" id="{AB0BB4B5-BBD2-5873-7CE7-E186E1FCEFBB}"/>
+              </a:ext>
+            </a:extLst>
+          </p:cNvPr>
+          <p:cNvSpPr/>
           <p:nvPr/>
-        </p:nvPicPr>
-        <p:blipFill>
-          <a:blip r:embed="rId3"/>
-          <a:stretch>
-            <a:fillRect/>
-          </a:stretch>
-        </p:blipFill>
+        </p:nvSpPr>
         <p:spPr>
-          <a:xfrm>
-            <a:off x="0" y="0"/>
-            <a:ext cx="12192000" cy="6858000"/>
-          </a:xfrm>
-          <a:prstGeom prst="rect">
+          <a:xfrm rot="5077597">
+            <a:off x="1254696" y="3381782"/>
+            <a:ext cx="1716066" cy="2242159"/>
+          </a:xfrm>
+          <a:prstGeom prst="downArrow">
             <a:avLst/>
           </a:prstGeom>
         </p:spPr>
-      </p:pic>
+        <p:style>
+          <a:lnRef idx="2">
+            <a:schemeClr val="accent6">
+              <a:shade val="15000"/>
+            </a:schemeClr>
+          </a:lnRef>
+          <a:fillRef idx="1">
+            <a:schemeClr val="accent6"/>
+          </a:fillRef>
+          <a:effectRef idx="0">
+            <a:schemeClr val="accent6"/>
+          </a:effectRef>
+          <a:fontRef idx="minor">
+            <a:schemeClr val="lt1"/>
+          </a:fontRef>
+        </p:style>
+        <p:txBody>
+          <a:bodyPr rtlCol="0" anchor="ctr"/>
+          <a:lstStyle/>
+          <a:p>
+            <a:pPr algn="ctr"/>
+            <a:endParaRPr lang="en-US"/>
+          </a:p>
+        </p:txBody>
+      </p:sp>
+      <p:sp>
+        <p:nvSpPr>
+          <p:cNvPr id="8" name="Seta: para Baixo 7">
+            <a:extLst>
+              <a:ext uri="{FF2B5EF4-FFF2-40B4-BE49-F238E27FC236}">
+                <a16:creationId xmlns:a16="http://schemas.microsoft.com/office/drawing/2014/main" id="{249C5844-12E7-A0BA-2262-A18759A062BF}"/>
+              </a:ext>
+            </a:extLst>
+          </p:cNvPr>
+          <p:cNvSpPr/>
+          <p:nvPr/>
+        </p:nvSpPr>
+        <p:spPr>
+          <a:xfrm rot="10484490">
+            <a:off x="3875738" y="1912877"/>
+            <a:ext cx="1716066" cy="2242159"/>
+          </a:xfrm>
+          <a:prstGeom prst="downArrow">
+            <a:avLst/>
+          </a:prstGeom>
+        </p:spPr>
+        <p:style>
+          <a:lnRef idx="2">
+            <a:schemeClr val="accent6">
+              <a:shade val="15000"/>
+            </a:schemeClr>
+          </a:lnRef>
+          <a:fillRef idx="1">
+            <a:schemeClr val="accent6"/>
+          </a:fillRef>
+          <a:effectRef idx="0">
+            <a:schemeClr val="accent6"/>
+          </a:effectRef>
+          <a:fontRef idx="minor">
+            <a:schemeClr val="lt1"/>
+          </a:fontRef>
+        </p:style>
+        <p:txBody>
+          <a:bodyPr rtlCol="0" anchor="ctr"/>
+          <a:lstStyle/>
+          <a:p>
+            <a:pPr algn="ctr"/>
+            <a:endParaRPr lang="en-US"/>
+          </a:p>
+        </p:txBody>
+      </p:sp>
     </p:spTree>
+    <p:extLst>
+      <p:ext uri="{BB962C8B-B14F-4D97-AF65-F5344CB8AC3E}">
+        <p14:creationId xmlns:p14="http://schemas.microsoft.com/office/powerpoint/2010/main" val="3219927166"/>
+      </p:ext>
+    </p:extLst>
   </p:cSld>
   <p:clrMapOvr>
     <a:masterClrMapping/>
@@ -8858,300 +8515,6 @@
       <p:pic>
         <p:nvPicPr>
           <p:cNvPr id="2" name="Picture 1" descr="mod8_slide2.png"/>
-          <p:cNvPicPr>
-            <a:picLocks noChangeAspect="1"/>
-          </p:cNvPicPr>
-          <p:nvPr/>
-        </p:nvPicPr>
-        <p:blipFill>
-          <a:blip r:embed="rId3"/>
-          <a:stretch>
-            <a:fillRect/>
-          </a:stretch>
-        </p:blipFill>
-        <p:spPr>
-          <a:xfrm>
-            <a:off x="0" y="0"/>
-            <a:ext cx="12192000" cy="6858000"/>
-          </a:xfrm>
-          <a:prstGeom prst="rect">
-            <a:avLst/>
-          </a:prstGeom>
-        </p:spPr>
-      </p:pic>
-    </p:spTree>
-  </p:cSld>
-  <p:clrMapOvr>
-    <a:masterClrMapping/>
-  </p:clrMapOvr>
-</p:sld>
-</file>
-
-<file path=ppt/slides/slide20.xml><?xml version="1.0" encoding="utf-8"?>
-<p:sld xmlns:a="http://schemas.openxmlformats.org/drawingml/2006/main" xmlns:r="http://schemas.openxmlformats.org/officeDocument/2006/relationships" xmlns:p="http://schemas.openxmlformats.org/presentationml/2006/main">
-  <p:cSld>
-    <p:spTree>
-      <p:nvGrpSpPr>
-        <p:cNvPr id="1" name=""/>
-        <p:cNvGrpSpPr/>
-        <p:nvPr/>
-      </p:nvGrpSpPr>
-      <p:grpSpPr>
-        <a:xfrm>
-          <a:off x="0" y="0"/>
-          <a:ext cx="0" cy="0"/>
-          <a:chOff x="0" y="0"/>
-          <a:chExt cx="0" cy="0"/>
-        </a:xfrm>
-      </p:grpSpPr>
-      <p:pic>
-        <p:nvPicPr>
-          <p:cNvPr id="2" name="Picture 1" descr="mod8_slide10.png"/>
-          <p:cNvPicPr>
-            <a:picLocks noChangeAspect="1"/>
-          </p:cNvPicPr>
-          <p:nvPr/>
-        </p:nvPicPr>
-        <p:blipFill>
-          <a:blip r:embed="rId3"/>
-          <a:stretch>
-            <a:fillRect/>
-          </a:stretch>
-        </p:blipFill>
-        <p:spPr>
-          <a:xfrm>
-            <a:off x="0" y="0"/>
-            <a:ext cx="12192000" cy="6858000"/>
-          </a:xfrm>
-          <a:prstGeom prst="rect">
-            <a:avLst/>
-          </a:prstGeom>
-        </p:spPr>
-      </p:pic>
-    </p:spTree>
-  </p:cSld>
-  <p:clrMapOvr>
-    <a:masterClrMapping/>
-  </p:clrMapOvr>
-</p:sld>
-</file>
-
-<file path=ppt/slides/slide21.xml><?xml version="1.0" encoding="utf-8"?>
-<p:sld xmlns:a="http://schemas.openxmlformats.org/drawingml/2006/main" xmlns:r="http://schemas.openxmlformats.org/officeDocument/2006/relationships" xmlns:p="http://schemas.openxmlformats.org/presentationml/2006/main">
-  <p:cSld>
-    <p:spTree>
-      <p:nvGrpSpPr>
-        <p:cNvPr id="1" name=""/>
-        <p:cNvGrpSpPr/>
-        <p:nvPr/>
-      </p:nvGrpSpPr>
-      <p:grpSpPr>
-        <a:xfrm>
-          <a:off x="0" y="0"/>
-          <a:ext cx="0" cy="0"/>
-          <a:chOff x="0" y="0"/>
-          <a:chExt cx="0" cy="0"/>
-        </a:xfrm>
-      </p:grpSpPr>
-      <p:pic>
-        <p:nvPicPr>
-          <p:cNvPr id="2" name="Picture 1" descr="mod8_slide11.png"/>
-          <p:cNvPicPr>
-            <a:picLocks noChangeAspect="1"/>
-          </p:cNvPicPr>
-          <p:nvPr/>
-        </p:nvPicPr>
-        <p:blipFill>
-          <a:blip r:embed="rId3"/>
-          <a:stretch>
-            <a:fillRect/>
-          </a:stretch>
-        </p:blipFill>
-        <p:spPr>
-          <a:xfrm>
-            <a:off x="0" y="0"/>
-            <a:ext cx="12192000" cy="6858000"/>
-          </a:xfrm>
-          <a:prstGeom prst="rect">
-            <a:avLst/>
-          </a:prstGeom>
-        </p:spPr>
-      </p:pic>
-    </p:spTree>
-  </p:cSld>
-  <p:clrMapOvr>
-    <a:masterClrMapping/>
-  </p:clrMapOvr>
-</p:sld>
-</file>
-
-<file path=ppt/slides/slide22.xml><?xml version="1.0" encoding="utf-8"?>
-<p:sld xmlns:a="http://schemas.openxmlformats.org/drawingml/2006/main" xmlns:r="http://schemas.openxmlformats.org/officeDocument/2006/relationships" xmlns:p="http://schemas.openxmlformats.org/presentationml/2006/main">
-  <p:cSld>
-    <p:spTree>
-      <p:nvGrpSpPr>
-        <p:cNvPr id="1" name=""/>
-        <p:cNvGrpSpPr/>
-        <p:nvPr/>
-      </p:nvGrpSpPr>
-      <p:grpSpPr>
-        <a:xfrm>
-          <a:off x="0" y="0"/>
-          <a:ext cx="0" cy="0"/>
-          <a:chOff x="0" y="0"/>
-          <a:chExt cx="0" cy="0"/>
-        </a:xfrm>
-      </p:grpSpPr>
-      <p:pic>
-        <p:nvPicPr>
-          <p:cNvPr id="2" name="Picture 1" descr="mod8_slide12.png"/>
-          <p:cNvPicPr>
-            <a:picLocks noChangeAspect="1"/>
-          </p:cNvPicPr>
-          <p:nvPr/>
-        </p:nvPicPr>
-        <p:blipFill>
-          <a:blip r:embed="rId3"/>
-          <a:stretch>
-            <a:fillRect/>
-          </a:stretch>
-        </p:blipFill>
-        <p:spPr>
-          <a:xfrm>
-            <a:off x="0" y="0"/>
-            <a:ext cx="12192000" cy="6858000"/>
-          </a:xfrm>
-          <a:prstGeom prst="rect">
-            <a:avLst/>
-          </a:prstGeom>
-        </p:spPr>
-      </p:pic>
-    </p:spTree>
-  </p:cSld>
-  <p:clrMapOvr>
-    <a:masterClrMapping/>
-  </p:clrMapOvr>
-</p:sld>
-</file>
-
-<file path=ppt/slides/slide23.xml><?xml version="1.0" encoding="utf-8"?>
-<p:sld xmlns:a="http://schemas.openxmlformats.org/drawingml/2006/main" xmlns:r="http://schemas.openxmlformats.org/officeDocument/2006/relationships" xmlns:p="http://schemas.openxmlformats.org/presentationml/2006/main">
-  <p:cSld>
-    <p:spTree>
-      <p:nvGrpSpPr>
-        <p:cNvPr id="1" name=""/>
-        <p:cNvGrpSpPr/>
-        <p:nvPr/>
-      </p:nvGrpSpPr>
-      <p:grpSpPr>
-        <a:xfrm>
-          <a:off x="0" y="0"/>
-          <a:ext cx="0" cy="0"/>
-          <a:chOff x="0" y="0"/>
-          <a:chExt cx="0" cy="0"/>
-        </a:xfrm>
-      </p:grpSpPr>
-      <p:pic>
-        <p:nvPicPr>
-          <p:cNvPr id="2" name="Picture 1" descr="mod8_slide13.png"/>
-          <p:cNvPicPr>
-            <a:picLocks noChangeAspect="1"/>
-          </p:cNvPicPr>
-          <p:nvPr/>
-        </p:nvPicPr>
-        <p:blipFill>
-          <a:blip r:embed="rId3"/>
-          <a:stretch>
-            <a:fillRect/>
-          </a:stretch>
-        </p:blipFill>
-        <p:spPr>
-          <a:xfrm>
-            <a:off x="0" y="0"/>
-            <a:ext cx="12192000" cy="6858000"/>
-          </a:xfrm>
-          <a:prstGeom prst="rect">
-            <a:avLst/>
-          </a:prstGeom>
-        </p:spPr>
-      </p:pic>
-    </p:spTree>
-  </p:cSld>
-  <p:clrMapOvr>
-    <a:masterClrMapping/>
-  </p:clrMapOvr>
-</p:sld>
-</file>
-
-<file path=ppt/slides/slide24.xml><?xml version="1.0" encoding="utf-8"?>
-<p:sld xmlns:a="http://schemas.openxmlformats.org/drawingml/2006/main" xmlns:r="http://schemas.openxmlformats.org/officeDocument/2006/relationships" xmlns:p="http://schemas.openxmlformats.org/presentationml/2006/main">
-  <p:cSld>
-    <p:spTree>
-      <p:nvGrpSpPr>
-        <p:cNvPr id="1" name=""/>
-        <p:cNvGrpSpPr/>
-        <p:nvPr/>
-      </p:nvGrpSpPr>
-      <p:grpSpPr>
-        <a:xfrm>
-          <a:off x="0" y="0"/>
-          <a:ext cx="0" cy="0"/>
-          <a:chOff x="0" y="0"/>
-          <a:chExt cx="0" cy="0"/>
-        </a:xfrm>
-      </p:grpSpPr>
-      <p:pic>
-        <p:nvPicPr>
-          <p:cNvPr id="2" name="Picture 1" descr="mod8_slide14.png"/>
-          <p:cNvPicPr>
-            <a:picLocks noChangeAspect="1"/>
-          </p:cNvPicPr>
-          <p:nvPr/>
-        </p:nvPicPr>
-        <p:blipFill>
-          <a:blip r:embed="rId3"/>
-          <a:stretch>
-            <a:fillRect/>
-          </a:stretch>
-        </p:blipFill>
-        <p:spPr>
-          <a:xfrm>
-            <a:off x="0" y="0"/>
-            <a:ext cx="12192000" cy="6858000"/>
-          </a:xfrm>
-          <a:prstGeom prst="rect">
-            <a:avLst/>
-          </a:prstGeom>
-        </p:spPr>
-      </p:pic>
-    </p:spTree>
-  </p:cSld>
-  <p:clrMapOvr>
-    <a:masterClrMapping/>
-  </p:clrMapOvr>
-</p:sld>
-</file>
-
-<file path=ppt/slides/slide25.xml><?xml version="1.0" encoding="utf-8"?>
-<p:sld xmlns:a="http://schemas.openxmlformats.org/drawingml/2006/main" xmlns:r="http://schemas.openxmlformats.org/officeDocument/2006/relationships" xmlns:p="http://schemas.openxmlformats.org/presentationml/2006/main">
-  <p:cSld>
-    <p:spTree>
-      <p:nvGrpSpPr>
-        <p:cNvPr id="1" name=""/>
-        <p:cNvGrpSpPr/>
-        <p:nvPr/>
-      </p:nvGrpSpPr>
-      <p:grpSpPr>
-        <a:xfrm>
-          <a:off x="0" y="0"/>
-          <a:ext cx="0" cy="0"/>
-          <a:chOff x="0" y="0"/>
-          <a:chExt cx="0" cy="0"/>
-        </a:xfrm>
-      </p:grpSpPr>
-      <p:pic>
-        <p:nvPicPr>
-          <p:cNvPr id="2" name="Picture 1" descr="mod8_slide15.png"/>
           <p:cNvPicPr>
             <a:picLocks noChangeAspect="1"/>
           </p:cNvPicPr>
